--- a/classes/parte-13-seguridad-movil-iot-e-inalambrica/264-pentest-de-aplicaciones-ios/clase-264-presentacion.pptx
+++ b/classes/parte-13-seguridad-movil-iot-e-inalambrica/264-pentest-de-aplicaciones-ios/clase-264-presentacion.pptx
@@ -17,6 +17,10 @@
     <p:sldId id="265" r:id="rId16"/>
     <p:sldId id="266" r:id="rId17"/>
     <p:sldId id="267" r:id="rId18"/>
+    <p:sldId id="268" r:id="rId19"/>
+    <p:sldId id="269" r:id="rId20"/>
+    <p:sldId id="270" r:id="rId21"/>
+    <p:sldId id="271" r:id="rId22"/>
   </p:sldIdLst>
   <p:sldSz cx="9144000" cy="6858000" type="screen4x3"/>
   <p:notesSz cx="6858000" cy="9144000"/>
@@ -3198,7 +3202,7 @@
                   <a:srgbClr val="0B3D2E"/>
                 </a:solidFill>
               </a:rPr>
-              <a:t>⚠️ Errores comunes</a:t>
+              <a:t>🧪 Laboratorio guiado</a:t>
             </a:r>
           </a:p>
         </p:txBody>
@@ -3236,67 +3240,97 @@
                   <a:srgbClr val="22282E"/>
                 </a:solidFill>
               </a:rPr>
-              <a:t>•  dump.py falla al conectar — frida-server no corre en el dispositivo o versión distinta; alinea versiones</a:t>
-            </a:r>
-          </a:p>
-          <a:p>
-            <a:pPr>
-              <a:spcAft>
-                <a:spcPts val="600"/>
-              </a:spcAft>
-            </a:pPr>
-            <a:r>
-              <a:rPr sz="1500">
-                <a:solidFill>
-                  <a:srgbClr val="22282E"/>
-                </a:solidFill>
-              </a:rPr>
-              <a:t>•  class-dump devuelve poco — App en Swift; usa Frida/Ghidra en su lugar</a:t>
-            </a:r>
-          </a:p>
-          <a:p>
-            <a:pPr>
-              <a:spcAft>
-                <a:spcPts val="600"/>
-              </a:spcAft>
-            </a:pPr>
-            <a:r>
-              <a:rPr sz="1500">
-                <a:solidFill>
-                  <a:srgbClr val="22282E"/>
-                </a:solidFill>
-              </a:rPr>
-              <a:t>•  Burp sin tráfico — CA no confiado o pinning; confía el perfil y evade pinning</a:t>
-            </a:r>
-          </a:p>
-          <a:p>
-            <a:pPr>
-              <a:spcAft>
-                <a:spcPts val="600"/>
-              </a:spcAft>
-            </a:pPr>
-            <a:r>
-              <a:rPr sz="1500">
-                <a:solidFill>
-                  <a:srgbClr val="22282E"/>
-                </a:solidFill>
-              </a:rPr>
-              <a:t>•  App se cierra al abrir — Jailbreak detection; usa objection para desactivarla</a:t>
-            </a:r>
-          </a:p>
-          <a:p>
-            <a:pPr>
-              <a:spcAft>
-                <a:spcPts val="600"/>
-              </a:spcAft>
-            </a:pPr>
-            <a:r>
-              <a:rPr sz="1500">
-                <a:solidFill>
-                  <a:srgbClr val="22282E"/>
-                </a:solidFill>
-              </a:rPr>
-              <a:t>•  codesign no muestra entitlements — Binario cifrado; descífralo primero</a:t>
+              <a:t>•  Instala la app vulnerable propia (DVIA-v2) en el dispositivo jailbroken.</a:t>
+            </a:r>
+          </a:p>
+          <a:p>
+            <a:pPr>
+              <a:spcAft>
+                <a:spcPts val="600"/>
+              </a:spcAft>
+            </a:pPr>
+            <a:r>
+              <a:rPr sz="1500">
+                <a:solidFill>
+                  <a:srgbClr val="22282E"/>
+                </a:solidFill>
+              </a:rPr>
+              <a:t>•  Descifra el binario: ejecuta python3 dump.py DVIA-v2 y obtén el IPA descifrado.</a:t>
+            </a:r>
+          </a:p>
+          <a:p>
+            <a:pPr>
+              <a:spcAft>
+                <a:spcPts val="600"/>
+              </a:spcAft>
+            </a:pPr>
+            <a:r>
+              <a:rPr sz="1500">
+                <a:solidFill>
+                  <a:srgbClr val="22282E"/>
+                </a:solidFill>
+              </a:rPr>
+              <a:t>•  Analiza estáticamente: descomprime el IPA; revisa Info.plist con plutil -p, extrae entitlements (codesign -d --entitlements :-) y vuelca clases con class-dump.</a:t>
+            </a:r>
+          </a:p>
+          <a:p>
+            <a:pPr>
+              <a:spcAft>
+                <a:spcPts val="600"/>
+              </a:spcAft>
+            </a:pPr>
+            <a:r>
+              <a:rPr sz="1500">
+                <a:solidFill>
+                  <a:srgbClr val="22282E"/>
+                </a:solidFill>
+              </a:rPr>
+              <a:t>•  Busca secretos: strings &lt;binario&gt; | grep -iE "http://|apikey|secret|token".</a:t>
+            </a:r>
+          </a:p>
+          <a:p>
+            <a:pPr>
+              <a:spcAft>
+                <a:spcPts val="600"/>
+              </a:spcAft>
+            </a:pPr>
+            <a:r>
+              <a:rPr sz="1500">
+                <a:solidFill>
+                  <a:srgbClr val="22282E"/>
+                </a:solidFill>
+              </a:rPr>
+              <a:t>•  Inspecciona almacenamiento: con objection, env para localizar directorios, luego revisa Documents/, Library/Preferences/.plist y bases SQLite.</a:t>
+            </a:r>
+          </a:p>
+          <a:p>
+            <a:pPr>
+              <a:spcAft>
+                <a:spcPts val="600"/>
+              </a:spcAft>
+            </a:pPr>
+            <a:r>
+              <a:rPr sz="1500">
+                <a:solidFill>
+                  <a:srgbClr val="22282E"/>
+                </a:solidFill>
+              </a:rPr>
+              <a:t>•  Vuelca el Keychain: objection -g &lt;app&gt; explore → ios keychain dump y anota clases de accesibilidad.</a:t>
+            </a:r>
+          </a:p>
+          <a:p>
+            <a:pPr>
+              <a:spcAft>
+                <a:spcPts val="600"/>
+              </a:spcAft>
+            </a:pPr>
+            <a:r>
+              <a:rPr sz="1500">
+                <a:solidFill>
+                  <a:srgbClr val="22282E"/>
+                </a:solidFill>
+              </a:rPr>
+              <a:t>•  Intercepta TLS: configura proxy y CA; si hay pinning, ejecuta ios sslpinning disable. Verifica el tráfico en Burp.</a:t>
             </a:r>
           </a:p>
         </p:txBody>
@@ -3347,7 +3381,7 @@
                   <a:srgbClr val="0B3D2E"/>
                 </a:solidFill>
               </a:rPr>
-              <a:t>❓ Preguntas frecuentes</a:t>
+              <a:t>✍️ Ejercicios</a:t>
             </a:r>
           </a:p>
         </p:txBody>
@@ -3385,82 +3419,82 @@
                   <a:srgbClr val="22282E"/>
                 </a:solidFill>
               </a:rPr>
-              <a:t>•  ❓ ¿Por qué hay que descifrar el binario antes de analizarlo?</a:t>
-            </a:r>
-          </a:p>
-          <a:p>
-            <a:pPr>
-              <a:spcAft>
-                <a:spcPts val="600"/>
-              </a:spcAft>
-            </a:pPr>
-            <a:r>
-              <a:rPr sz="1500">
-                <a:solidFill>
-                  <a:srgbClr val="22282E"/>
-                </a:solidFill>
-              </a:rPr>
-              <a:t>•  Las apps de App Store se distribuyen con cifrado FairPlay; el RE estático solo es útil sobre el binario descifrado que se vuelca desde memoria.</a:t>
-            </a:r>
-          </a:p>
-          <a:p>
-            <a:pPr>
-              <a:spcAft>
-                <a:spcPts val="600"/>
-              </a:spcAft>
-            </a:pPr>
-            <a:r>
-              <a:rPr sz="1500">
-                <a:solidFill>
-                  <a:srgbClr val="22282E"/>
-                </a:solidFill>
-              </a:rPr>
-              <a:t>•  ❓ ¿Es más difícil hookear Swift que Objective-C?</a:t>
-            </a:r>
-          </a:p>
-          <a:p>
-            <a:pPr>
-              <a:spcAft>
-                <a:spcPts val="600"/>
-              </a:spcAft>
-            </a:pPr>
-            <a:r>
-              <a:rPr sz="1500">
-                <a:solidFill>
-                  <a:srgbClr val="22282E"/>
-                </a:solidFill>
-              </a:rPr>
-              <a:t>•  Sí: Swift no expone metadatos de runtime tan ricos como Objective-C, por lo que class-dump aporta menos y suele recurrirse a Frida y análisis del binario.</a:t>
-            </a:r>
-          </a:p>
-          <a:p>
-            <a:pPr>
-              <a:spcAft>
-                <a:spcPts val="600"/>
-              </a:spcAft>
-            </a:pPr>
-            <a:r>
-              <a:rPr sz="1500">
-                <a:solidFill>
-                  <a:srgbClr val="22282E"/>
-                </a:solidFill>
-              </a:rPr>
-              <a:t>•  ❓ ¿Puedo hacer el pentest en el simulador de Xcode?</a:t>
-            </a:r>
-          </a:p>
-          <a:p>
-            <a:pPr>
-              <a:spcAft>
-                <a:spcPts val="600"/>
-              </a:spcAft>
-            </a:pPr>
-            <a:r>
-              <a:rPr sz="1500">
-                <a:solidFill>
-                  <a:srgbClr val="22282E"/>
-                </a:solidFill>
-              </a:rPr>
-              <a:t>•  Parcialmente: el simulador usa binarios x86/arm no cifrados y facilita ciertas pruebas, pero no reproduce el Secure Enclave ni el comportamiento real del hardware.</a:t>
+              <a:t>•  Descifra una app propia y confirma con otool -l que la sección LCENCRYPTIONINFO quedó a 0.</a:t>
+            </a:r>
+          </a:p>
+          <a:p>
+            <a:pPr>
+              <a:spcAft>
+                <a:spcPts val="600"/>
+              </a:spcAft>
+            </a:pPr>
+            <a:r>
+              <a:rPr sz="1500">
+                <a:solidFill>
+                  <a:srgbClr val="22282E"/>
+                </a:solidFill>
+              </a:rPr>
+              <a:t>•  Localiza en el Info.plist cualquier excepción ATS y evalúa su riesgo.</a:t>
+            </a:r>
+          </a:p>
+          <a:p>
+            <a:pPr>
+              <a:spcAft>
+                <a:spcPts val="600"/>
+              </a:spcAft>
+            </a:pPr>
+            <a:r>
+              <a:rPr sz="1500">
+                <a:solidFill>
+                  <a:srgbClr val="22282E"/>
+                </a:solidFill>
+              </a:rPr>
+              <a:t>•  Vuelca el Keychain de una app y clasifica cada ítem por su clase de protección.</a:t>
+            </a:r>
+          </a:p>
+          <a:p>
+            <a:pPr>
+              <a:spcAft>
+                <a:spcPts val="600"/>
+              </a:spcAft>
+            </a:pPr>
+            <a:r>
+              <a:rPr sz="1500">
+                <a:solidFill>
+                  <a:srgbClr val="22282E"/>
+                </a:solidFill>
+              </a:rPr>
+              <a:t>•  Escribe un script Frida que hookee un método de detección de jailbreak y lo neutralice.</a:t>
+            </a:r>
+          </a:p>
+          <a:p>
+            <a:pPr>
+              <a:spcAft>
+                <a:spcPts val="600"/>
+              </a:spcAft>
+            </a:pPr>
+            <a:r>
+              <a:rPr sz="1500">
+                <a:solidFill>
+                  <a:srgbClr val="22282E"/>
+                </a:solidFill>
+              </a:rPr>
+              <a:t>•  Compara el tráfico antes y después de evadir el pinning.</a:t>
+            </a:r>
+          </a:p>
+          <a:p>
+            <a:pPr>
+              <a:spcAft>
+                <a:spcPts val="600"/>
+              </a:spcAft>
+            </a:pPr>
+            <a:r>
+              <a:rPr sz="1500">
+                <a:solidFill>
+                  <a:srgbClr val="22282E"/>
+                </a:solidFill>
+              </a:rPr>
+              <a:t>•  Mapea tus hallazgos a MASVS-STORAGE, MASVS-NETWORK y MASVS-RESILIENCE.</a:t>
             </a:r>
           </a:p>
         </p:txBody>
@@ -3511,7 +3545,7 @@
                   <a:srgbClr val="0B3D2E"/>
                 </a:solidFill>
               </a:rPr>
-              <a:t>🔗 Referencias</a:t>
+              <a:t>📝 Reto verificable</a:t>
             </a:r>
           </a:p>
         </p:txBody>
@@ -3549,6 +3583,408 @@
                   <a:srgbClr val="22282E"/>
                 </a:solidFill>
               </a:rPr>
+              <a:t>•  Completa un pentest de una app iOS vulnerable y entrega evidencia de tres hallazgos de distinta categoría. Criterio de aceptación: demuestras interceptación exitosa del tráfico HTTPS tras evadir el…</a:t>
+            </a:r>
+          </a:p>
+        </p:txBody>
+      </p:sp>
+    </p:spTree>
+  </p:cSld>
+  <p:clrMapOvr>
+    <a:masterClrMapping/>
+  </p:clrMapOvr>
+</p:sld>
+</file>
+
+<file path=ppt/slides/slide13.xml><?xml version="1.0" encoding="utf-8"?>
+<p:sld xmlns:a="http://schemas.openxmlformats.org/drawingml/2006/main" xmlns:p="http://schemas.openxmlformats.org/presentationml/2006/main" xmlns:r="http://schemas.openxmlformats.org/officeDocument/2006/relationships">
+  <p:cSld>
+    <p:spTree>
+      <p:nvGrpSpPr>
+        <p:cNvPr id="1" name=""/>
+        <p:cNvGrpSpPr/>
+        <p:nvPr/>
+      </p:nvGrpSpPr>
+      <p:grpSpPr/>
+      <p:sp>
+        <p:nvSpPr>
+          <p:cNvPr id="2" name="TextBox 1"/>
+          <p:cNvSpPr txBox="1"/>
+          <p:nvPr/>
+        </p:nvSpPr>
+        <p:spPr>
+          <a:xfrm>
+            <a:off x="457200" y="320040"/>
+            <a:ext cx="8229600" cy="822960"/>
+          </a:xfrm>
+          <a:prstGeom prst="rect">
+            <a:avLst/>
+          </a:prstGeom>
+          <a:noFill/>
+        </p:spPr>
+        <p:txBody>
+          <a:bodyPr wrap="square">
+            <a:spAutoFit/>
+          </a:bodyPr>
+          <a:lstStyle/>
+          <a:p>
+            <a:r>
+              <a:rPr sz="2600" b="1">
+                <a:solidFill>
+                  <a:srgbClr val="0B3D2E"/>
+                </a:solidFill>
+              </a:rPr>
+              <a:t>⚠️ Errores comunes</a:t>
+            </a:r>
+          </a:p>
+        </p:txBody>
+      </p:sp>
+      <p:sp>
+        <p:nvSpPr>
+          <p:cNvPr id="3" name="TextBox 2"/>
+          <p:cNvSpPr txBox="1"/>
+          <p:nvPr/>
+        </p:nvSpPr>
+        <p:spPr>
+          <a:xfrm>
+            <a:off x="457200" y="1280160"/>
+            <a:ext cx="8229600" cy="4937760"/>
+          </a:xfrm>
+          <a:prstGeom prst="rect">
+            <a:avLst/>
+          </a:prstGeom>
+          <a:noFill/>
+        </p:spPr>
+        <p:txBody>
+          <a:bodyPr wrap="square">
+            <a:spAutoFit/>
+          </a:bodyPr>
+          <a:lstStyle/>
+          <a:p>
+            <a:pPr>
+              <a:spcAft>
+                <a:spcPts val="600"/>
+              </a:spcAft>
+            </a:pPr>
+            <a:r>
+              <a:rPr sz="1500">
+                <a:solidFill>
+                  <a:srgbClr val="22282E"/>
+                </a:solidFill>
+              </a:rPr>
+              <a:t>•  dump.py falla al conectar — frida-server no corre en el dispositivo o versión distinta; alinea versiones</a:t>
+            </a:r>
+          </a:p>
+          <a:p>
+            <a:pPr>
+              <a:spcAft>
+                <a:spcPts val="600"/>
+              </a:spcAft>
+            </a:pPr>
+            <a:r>
+              <a:rPr sz="1500">
+                <a:solidFill>
+                  <a:srgbClr val="22282E"/>
+                </a:solidFill>
+              </a:rPr>
+              <a:t>•  class-dump devuelve poco — App en Swift; usa Frida/Ghidra en su lugar</a:t>
+            </a:r>
+          </a:p>
+          <a:p>
+            <a:pPr>
+              <a:spcAft>
+                <a:spcPts val="600"/>
+              </a:spcAft>
+            </a:pPr>
+            <a:r>
+              <a:rPr sz="1500">
+                <a:solidFill>
+                  <a:srgbClr val="22282E"/>
+                </a:solidFill>
+              </a:rPr>
+              <a:t>•  Burp sin tráfico — CA no confiado o pinning; confía el perfil y evade pinning</a:t>
+            </a:r>
+          </a:p>
+          <a:p>
+            <a:pPr>
+              <a:spcAft>
+                <a:spcPts val="600"/>
+              </a:spcAft>
+            </a:pPr>
+            <a:r>
+              <a:rPr sz="1500">
+                <a:solidFill>
+                  <a:srgbClr val="22282E"/>
+                </a:solidFill>
+              </a:rPr>
+              <a:t>•  App se cierra al abrir — Jailbreak detection; usa objection para desactivarla</a:t>
+            </a:r>
+          </a:p>
+          <a:p>
+            <a:pPr>
+              <a:spcAft>
+                <a:spcPts val="600"/>
+              </a:spcAft>
+            </a:pPr>
+            <a:r>
+              <a:rPr sz="1500">
+                <a:solidFill>
+                  <a:srgbClr val="22282E"/>
+                </a:solidFill>
+              </a:rPr>
+              <a:t>•  codesign no muestra entitlements — Binario cifrado; descífralo primero</a:t>
+            </a:r>
+          </a:p>
+        </p:txBody>
+      </p:sp>
+    </p:spTree>
+  </p:cSld>
+  <p:clrMapOvr>
+    <a:masterClrMapping/>
+  </p:clrMapOvr>
+</p:sld>
+</file>
+
+<file path=ppt/slides/slide14.xml><?xml version="1.0" encoding="utf-8"?>
+<p:sld xmlns:a="http://schemas.openxmlformats.org/drawingml/2006/main" xmlns:p="http://schemas.openxmlformats.org/presentationml/2006/main" xmlns:r="http://schemas.openxmlformats.org/officeDocument/2006/relationships">
+  <p:cSld>
+    <p:spTree>
+      <p:nvGrpSpPr>
+        <p:cNvPr id="1" name=""/>
+        <p:cNvGrpSpPr/>
+        <p:nvPr/>
+      </p:nvGrpSpPr>
+      <p:grpSpPr/>
+      <p:sp>
+        <p:nvSpPr>
+          <p:cNvPr id="2" name="TextBox 1"/>
+          <p:cNvSpPr txBox="1"/>
+          <p:nvPr/>
+        </p:nvSpPr>
+        <p:spPr>
+          <a:xfrm>
+            <a:off x="457200" y="320040"/>
+            <a:ext cx="8229600" cy="822960"/>
+          </a:xfrm>
+          <a:prstGeom prst="rect">
+            <a:avLst/>
+          </a:prstGeom>
+          <a:noFill/>
+        </p:spPr>
+        <p:txBody>
+          <a:bodyPr wrap="square">
+            <a:spAutoFit/>
+          </a:bodyPr>
+          <a:lstStyle/>
+          <a:p>
+            <a:r>
+              <a:rPr sz="2600" b="1">
+                <a:solidFill>
+                  <a:srgbClr val="0B3D2E"/>
+                </a:solidFill>
+              </a:rPr>
+              <a:t>❓ Preguntas frecuentes</a:t>
+            </a:r>
+          </a:p>
+        </p:txBody>
+      </p:sp>
+      <p:sp>
+        <p:nvSpPr>
+          <p:cNvPr id="3" name="TextBox 2"/>
+          <p:cNvSpPr txBox="1"/>
+          <p:nvPr/>
+        </p:nvSpPr>
+        <p:spPr>
+          <a:xfrm>
+            <a:off x="457200" y="1280160"/>
+            <a:ext cx="8229600" cy="4937760"/>
+          </a:xfrm>
+          <a:prstGeom prst="rect">
+            <a:avLst/>
+          </a:prstGeom>
+          <a:noFill/>
+        </p:spPr>
+        <p:txBody>
+          <a:bodyPr wrap="square">
+            <a:spAutoFit/>
+          </a:bodyPr>
+          <a:lstStyle/>
+          <a:p>
+            <a:pPr>
+              <a:spcAft>
+                <a:spcPts val="600"/>
+              </a:spcAft>
+            </a:pPr>
+            <a:r>
+              <a:rPr sz="1500">
+                <a:solidFill>
+                  <a:srgbClr val="22282E"/>
+                </a:solidFill>
+              </a:rPr>
+              <a:t>•  ❓ ¿Por qué hay que descifrar el binario antes de analizarlo?</a:t>
+            </a:r>
+          </a:p>
+          <a:p>
+            <a:pPr>
+              <a:spcAft>
+                <a:spcPts val="600"/>
+              </a:spcAft>
+            </a:pPr>
+            <a:r>
+              <a:rPr sz="1500">
+                <a:solidFill>
+                  <a:srgbClr val="22282E"/>
+                </a:solidFill>
+              </a:rPr>
+              <a:t>•  Las apps de App Store se distribuyen con cifrado FairPlay; el RE estático solo es útil sobre el binario descifrado que se vuelca desde memoria.</a:t>
+            </a:r>
+          </a:p>
+          <a:p>
+            <a:pPr>
+              <a:spcAft>
+                <a:spcPts val="600"/>
+              </a:spcAft>
+            </a:pPr>
+            <a:r>
+              <a:rPr sz="1500">
+                <a:solidFill>
+                  <a:srgbClr val="22282E"/>
+                </a:solidFill>
+              </a:rPr>
+              <a:t>•  ❓ ¿Es más difícil hookear Swift que Objective-C?</a:t>
+            </a:r>
+          </a:p>
+          <a:p>
+            <a:pPr>
+              <a:spcAft>
+                <a:spcPts val="600"/>
+              </a:spcAft>
+            </a:pPr>
+            <a:r>
+              <a:rPr sz="1500">
+                <a:solidFill>
+                  <a:srgbClr val="22282E"/>
+                </a:solidFill>
+              </a:rPr>
+              <a:t>•  Sí: Swift no expone metadatos de runtime tan ricos como Objective-C, por lo que class-dump aporta menos y suele recurrirse a Frida y análisis del binario.</a:t>
+            </a:r>
+          </a:p>
+          <a:p>
+            <a:pPr>
+              <a:spcAft>
+                <a:spcPts val="600"/>
+              </a:spcAft>
+            </a:pPr>
+            <a:r>
+              <a:rPr sz="1500">
+                <a:solidFill>
+                  <a:srgbClr val="22282E"/>
+                </a:solidFill>
+              </a:rPr>
+              <a:t>•  ❓ ¿Puedo hacer el pentest en el simulador de Xcode?</a:t>
+            </a:r>
+          </a:p>
+          <a:p>
+            <a:pPr>
+              <a:spcAft>
+                <a:spcPts val="600"/>
+              </a:spcAft>
+            </a:pPr>
+            <a:r>
+              <a:rPr sz="1500">
+                <a:solidFill>
+                  <a:srgbClr val="22282E"/>
+                </a:solidFill>
+              </a:rPr>
+              <a:t>•  Parcialmente: el simulador usa binarios x86/arm no cifrados y facilita ciertas pruebas, pero no reproduce el Secure Enclave ni el comportamiento real del hardware.</a:t>
+            </a:r>
+          </a:p>
+        </p:txBody>
+      </p:sp>
+    </p:spTree>
+  </p:cSld>
+  <p:clrMapOvr>
+    <a:masterClrMapping/>
+  </p:clrMapOvr>
+</p:sld>
+</file>
+
+<file path=ppt/slides/slide15.xml><?xml version="1.0" encoding="utf-8"?>
+<p:sld xmlns:a="http://schemas.openxmlformats.org/drawingml/2006/main" xmlns:p="http://schemas.openxmlformats.org/presentationml/2006/main" xmlns:r="http://schemas.openxmlformats.org/officeDocument/2006/relationships">
+  <p:cSld>
+    <p:spTree>
+      <p:nvGrpSpPr>
+        <p:cNvPr id="1" name=""/>
+        <p:cNvGrpSpPr/>
+        <p:nvPr/>
+      </p:nvGrpSpPr>
+      <p:grpSpPr/>
+      <p:sp>
+        <p:nvSpPr>
+          <p:cNvPr id="2" name="TextBox 1"/>
+          <p:cNvSpPr txBox="1"/>
+          <p:nvPr/>
+        </p:nvSpPr>
+        <p:spPr>
+          <a:xfrm>
+            <a:off x="457200" y="320040"/>
+            <a:ext cx="8229600" cy="822960"/>
+          </a:xfrm>
+          <a:prstGeom prst="rect">
+            <a:avLst/>
+          </a:prstGeom>
+          <a:noFill/>
+        </p:spPr>
+        <p:txBody>
+          <a:bodyPr wrap="square">
+            <a:spAutoFit/>
+          </a:bodyPr>
+          <a:lstStyle/>
+          <a:p>
+            <a:r>
+              <a:rPr sz="2600" b="1">
+                <a:solidFill>
+                  <a:srgbClr val="0B3D2E"/>
+                </a:solidFill>
+              </a:rPr>
+              <a:t>🔗 Referencias</a:t>
+            </a:r>
+          </a:p>
+        </p:txBody>
+      </p:sp>
+      <p:sp>
+        <p:nvSpPr>
+          <p:cNvPr id="3" name="TextBox 2"/>
+          <p:cNvSpPr txBox="1"/>
+          <p:nvPr/>
+        </p:nvSpPr>
+        <p:spPr>
+          <a:xfrm>
+            <a:off x="457200" y="1280160"/>
+            <a:ext cx="8229600" cy="4937760"/>
+          </a:xfrm>
+          <a:prstGeom prst="rect">
+            <a:avLst/>
+          </a:prstGeom>
+          <a:noFill/>
+        </p:spPr>
+        <p:txBody>
+          <a:bodyPr wrap="square">
+            <a:spAutoFit/>
+          </a:bodyPr>
+          <a:lstStyle/>
+          <a:p>
+            <a:pPr>
+              <a:spcAft>
+                <a:spcPts val="600"/>
+              </a:spcAft>
+            </a:pPr>
+            <a:r>
+              <a:rPr sz="1500">
+                <a:solidFill>
+                  <a:srgbClr val="22282E"/>
+                </a:solidFill>
+              </a:rPr>
               <a:t>•  OWASP MASTG — iOS testing: &lt;https://mas.owasp.org/MASTG/&gt;</a:t>
             </a:r>
           </a:p>
@@ -3599,6 +4035,81 @@
           </a:p>
         </p:txBody>
       </p:sp>
+    </p:spTree>
+  </p:cSld>
+  <p:clrMapOvr>
+    <a:masterClrMapping/>
+  </p:clrMapOvr>
+</p:sld>
+</file>
+
+<file path=ppt/slides/slide16.xml><?xml version="1.0" encoding="utf-8"?>
+<p:sld xmlns:a="http://schemas.openxmlformats.org/drawingml/2006/main" xmlns:p="http://schemas.openxmlformats.org/presentationml/2006/main" xmlns:r="http://schemas.openxmlformats.org/officeDocument/2006/relationships">
+  <p:cSld>
+    <p:spTree>
+      <p:nvGrpSpPr>
+        <p:cNvPr id="1" name=""/>
+        <p:cNvGrpSpPr/>
+        <p:nvPr/>
+      </p:nvGrpSpPr>
+      <p:grpSpPr/>
+      <p:sp>
+        <p:nvSpPr>
+          <p:cNvPr id="2" name="TextBox 1"/>
+          <p:cNvSpPr txBox="1"/>
+          <p:nvPr/>
+        </p:nvSpPr>
+        <p:spPr>
+          <a:xfrm>
+            <a:off x="457200" y="274320"/>
+            <a:ext cx="8229600" cy="640080"/>
+          </a:xfrm>
+          <a:prstGeom prst="rect">
+            <a:avLst/>
+          </a:prstGeom>
+          <a:noFill/>
+        </p:spPr>
+        <p:txBody>
+          <a:bodyPr wrap="square">
+            <a:spAutoFit/>
+          </a:bodyPr>
+          <a:lstStyle/>
+          <a:p>
+            <a:r>
+              <a:rPr sz="2200" b="1">
+                <a:solidFill>
+                  <a:srgbClr val="0B3D2E"/>
+                </a:solidFill>
+              </a:rPr>
+              <a:t>Diagrama de la clase</a:t>
+            </a:r>
+          </a:p>
+        </p:txBody>
+      </p:sp>
+      <p:pic>
+        <p:nvPicPr>
+          <p:cNvPr id="3" name="Picture 2" descr="b599508ee086711c.png"/>
+          <p:cNvPicPr>
+            <a:picLocks noChangeAspect="1"/>
+          </p:cNvPicPr>
+          <p:nvPr/>
+        </p:nvPicPr>
+        <p:blipFill>
+          <a:blip r:embed="rId2"/>
+          <a:stretch>
+            <a:fillRect/>
+          </a:stretch>
+        </p:blipFill>
+        <p:spPr>
+          <a:xfrm>
+            <a:off x="457200" y="3534156"/>
+            <a:ext cx="8229600" cy="429768"/>
+          </a:xfrm>
+          <a:prstGeom prst="rect">
+            <a:avLst/>
+          </a:prstGeom>
+        </p:spPr>
+      </p:pic>
     </p:spTree>
   </p:cSld>
   <p:clrMapOvr>
@@ -3683,7 +4194,7 @@
                   <a:srgbClr val="22282E"/>
                 </a:solidFill>
               </a:rPr>
-              <a:t>•  Realizar una evaluación de seguridad de una app iOS sobre un dispositivo con jailbreak: descifrar y analizar el IPA, inspeccionar el almacenamiento y el Keychain, interceptar tráfico TLS evadiendo pinning, y saltar detección de jailbreak con Frida/objection. El alumno aprenderá a adaptar la metodología MASVS al ecosistema iOS, donde el code signing y el sandbox imponen restricciones ausentes en Android.</a:t>
+              <a:t>•  Realizar una evaluación de seguridad de una app iOS sobre un dispositivo con jailbreak: descifrar y analizar el IPA, inspeccionar el almacenamiento y el Keychain, interceptar tráfico TLS evadiendo…</a:t>
             </a:r>
           </a:p>
         </p:txBody>
@@ -4092,7 +4603,7 @@
                   <a:srgbClr val="0B3D2E"/>
                 </a:solidFill>
               </a:rPr>
-              <a:t>📖 Definiciones y características</a:t>
+              <a:t>🧠 Explicación en profundidad</a:t>
             </a:r>
           </a:p>
         </p:txBody>
@@ -4130,82 +4641,52 @@
                   <a:srgbClr val="22282E"/>
                 </a:solidFill>
               </a:rPr>
-              <a:t>•  frida-ios-dump: herramienta que vuelca el binario descifrado desde memoria en un dispositivo con jailbreak. Característica: sortea el cifrado FairPlay para permitir RE.</a:t>
-            </a:r>
-          </a:p>
-          <a:p>
-            <a:pPr>
-              <a:spcAft>
-                <a:spcPts val="600"/>
-              </a:spcAft>
-            </a:pPr>
-            <a:r>
-              <a:rPr sz="1500">
-                <a:solidFill>
-                  <a:srgbClr val="22282E"/>
-                </a:solidFill>
-              </a:rPr>
-              <a:t>•  Info.plist: manifiesto de la app con configuración, permisos de privacidad y ATS. Característica: revela endpoints y excepciones de seguridad de transporte.</a:t>
-            </a:r>
-          </a:p>
-          <a:p>
-            <a:pPr>
-              <a:spcAft>
-                <a:spcPts val="600"/>
-              </a:spcAft>
-            </a:pPr>
-            <a:r>
-              <a:rPr sz="1500">
-                <a:solidFill>
-                  <a:srgbClr val="22282E"/>
-                </a:solidFill>
-              </a:rPr>
-              <a:t>•  App Transport Security (ATS): política que exige HTTPS moderno; sus excepciones (NSAllowsArbitraryLoads) debilitan la comunicación. Característica: hallazgo común de MASVS-NETWORK.</a:t>
-            </a:r>
-          </a:p>
-          <a:p>
-            <a:pPr>
-              <a:spcAft>
-                <a:spcPts val="600"/>
-              </a:spcAft>
-            </a:pPr>
-            <a:r>
-              <a:rPr sz="1500">
-                <a:solidFill>
-                  <a:srgbClr val="22282E"/>
-                </a:solidFill>
-              </a:rPr>
-              <a:t>•  objection: wrapper de Frida con comandos iOS (ios keychain dump, ios sslpinning disable, ios jailbreak disable). Característica: automatiza tareas típicas.</a:t>
-            </a:r>
-          </a:p>
-          <a:p>
-            <a:pPr>
-              <a:spcAft>
-                <a:spcPts val="600"/>
-              </a:spcAft>
-            </a:pPr>
-            <a:r>
-              <a:rPr sz="1500">
-                <a:solidFill>
-                  <a:srgbClr val="22282E"/>
-                </a:solidFill>
-              </a:rPr>
-              <a:t>•  Cycript/Frida: instrumentación en runtime para hookear métodos Objective-C/Swift. Característica: permite modificar el comportamiento en vivo.</a:t>
-            </a:r>
-          </a:p>
-          <a:p>
-            <a:pPr>
-              <a:spcAft>
-                <a:spcPts val="600"/>
-              </a:spcAft>
-            </a:pPr>
-            <a:r>
-              <a:rPr sz="1500">
-                <a:solidFill>
-                  <a:srgbClr val="22282E"/>
-                </a:solidFill>
-              </a:rPr>
-              <a:t>•  Data Protection class: clase de accesibilidad de un ítem del Keychain. Característica: determina si un dato es legible con el dispositivo bloqueado.</a:t>
+              <a:t>•  Una evaluación iOS combina revisión de IPA propia o autorizada, configuración, almacenamiento, comunicaciones, autenticación, IPC y lógica de negocio. Un dispositivo con jailbreak facilita inspección…</a:t>
+            </a:r>
+          </a:p>
+          <a:p>
+            <a:pPr>
+              <a:spcAft>
+                <a:spcPts val="600"/>
+              </a:spcAft>
+            </a:pPr>
+            <a:r>
+              <a:rPr sz="1500">
+                <a:solidFill>
+                  <a:srgbClr val="22282E"/>
+                </a:solidFill>
+              </a:rPr>
+              <a:t>•  El Info.plist y los entitlements muestran esquemas, dominios asociados, transport security, grupos y capacidades. Strings y símbolos orientan la revisión, pero Swift y optimización dificultan…</a:t>
+            </a:r>
+          </a:p>
+          <a:p>
+            <a:pPr>
+              <a:spcAft>
+                <a:spcPts val="600"/>
+              </a:spcAft>
+            </a:pPr>
+            <a:r>
+              <a:rPr sz="1500">
+                <a:solidFill>
+                  <a:srgbClr val="22282E"/>
+                </a:solidFill>
+              </a:rPr>
+              <a:t>•  En red se usan cuentas de laboratorio y backend incluido en alcance. Instrumentar pinning permite observar el protocolo, no autoriza atacar endpoints de terceros. La autorización se prueba con…</a:t>
+            </a:r>
+          </a:p>
+          <a:p>
+            <a:pPr>
+              <a:spcAft>
+                <a:spcPts val="600"/>
+              </a:spcAft>
+            </a:pPr>
+            <a:r>
+              <a:rPr sz="1500">
+                <a:solidFill>
+                  <a:srgbClr val="22282E"/>
+                </a:solidFill>
+              </a:rPr>
+              <a:t>•  Una app registra un esquema que recibe monto y beneficiario. Otra app de laboratorio puede invocarlo, pero la operación exige sesión y confirmación contextual; no hay transferencia automática. El…</a:t>
             </a:r>
           </a:p>
         </p:txBody>
@@ -4256,7 +4737,7 @@
                   <a:srgbClr val="0B3D2E"/>
                 </a:solidFill>
               </a:rPr>
-              <a:t>🧰 Herramientas y preparación</a:t>
+              <a:t>📔 Glosario operativo</a:t>
             </a:r>
           </a:p>
         </p:txBody>
@@ -4294,82 +4775,82 @@
                   <a:srgbClr val="22282E"/>
                 </a:solidFill>
               </a:rPr>
-              <a:t>•  pip install frida-tools objection</a:t>
-            </a:r>
-          </a:p>
-          <a:p>
-            <a:pPr>
-              <a:spcAft>
-                <a:spcPts val="600"/>
-              </a:spcAft>
-            </a:pPr>
-            <a:r>
-              <a:rPr sz="1500">
-                <a:solidFill>
-                  <a:srgbClr val="22282E"/>
-                </a:solidFill>
-              </a:rPr>
-              <a:t>•  frida-ps -Uai                        # listar apps instaladas por Frida (USB)</a:t>
-            </a:r>
-          </a:p>
-          <a:p>
-            <a:pPr>
-              <a:spcAft>
-                <a:spcPts val="600"/>
-              </a:spcAft>
-            </a:pPr>
-            <a:r>
-              <a:rPr sz="1500">
-                <a:solidFill>
-                  <a:srgbClr val="22282E"/>
-                </a:solidFill>
-              </a:rPr>
-              <a:t>•  git clone https://github.com/AloneMonkey/frida-ios-dump</a:t>
-            </a:r>
-          </a:p>
-          <a:p>
-            <a:pPr>
-              <a:spcAft>
-                <a:spcPts val="600"/>
-              </a:spcAft>
-            </a:pPr>
-            <a:r>
-              <a:rPr sz="1500">
-                <a:solidFill>
-                  <a:srgbClr val="22282E"/>
-                </a:solidFill>
-              </a:rPr>
-              <a:t>•  python3 dump.py &lt;nombreapp&gt;         # genera un .ipa descifrado</a:t>
-            </a:r>
-          </a:p>
-          <a:p>
-            <a:pPr>
-              <a:spcAft>
-                <a:spcPts val="600"/>
-              </a:spcAft>
-            </a:pPr>
-            <a:r>
-              <a:rPr sz="1500">
-                <a:solidFill>
-                  <a:srgbClr val="22282E"/>
-                </a:solidFill>
-              </a:rPr>
-              <a:t>•  Burp Suite/mitmproxy con su CA instalado como perfil de confianza en iOS.</a:t>
-            </a:r>
-          </a:p>
-          <a:p>
-            <a:pPr>
-              <a:spcAft>
-                <a:spcPts val="600"/>
-              </a:spcAft>
-            </a:pPr>
-            <a:r>
-              <a:rPr sz="1500">
-                <a:solidFill>
-                  <a:srgbClr val="22282E"/>
-                </a:solidFill>
-              </a:rPr>
-              <a:t>•  class-dump, Hopper/Ghidra, plutil para inspeccionar plists.</a:t>
+              <a:t>•  Término — Definición útil</a:t>
+            </a:r>
+          </a:p>
+          <a:p>
+            <a:pPr>
+              <a:spcAft>
+                <a:spcPts val="600"/>
+              </a:spcAft>
+            </a:pPr>
+            <a:r>
+              <a:rPr sz="1500">
+                <a:solidFill>
+                  <a:srgbClr val="22282E"/>
+                </a:solidFill>
+              </a:rPr>
+              <a:t>•  IPA — Paquete distribuible que contiene bundle y binarios de una app iOS.</a:t>
+            </a:r>
+          </a:p>
+          <a:p>
+            <a:pPr>
+              <a:spcAft>
+                <a:spcPts val="600"/>
+              </a:spcAft>
+            </a:pPr>
+            <a:r>
+              <a:rPr sz="1500">
+                <a:solidFill>
+                  <a:srgbClr val="22282E"/>
+                </a:solidFill>
+              </a:rPr>
+              <a:t>•  Jailbreak — Modificación que amplía acceso; altera el modelo del dispositivo de prueba.</a:t>
+            </a:r>
+          </a:p>
+          <a:p>
+            <a:pPr>
+              <a:spcAft>
+                <a:spcPts val="600"/>
+              </a:spcAft>
+            </a:pPr>
+            <a:r>
+              <a:rPr sz="1500">
+                <a:solidFill>
+                  <a:srgbClr val="22282E"/>
+                </a:solidFill>
+              </a:rPr>
+              <a:t>•  Info.plist — Configuración declarativa del bundle y varias superficies.</a:t>
+            </a:r>
+          </a:p>
+          <a:p>
+            <a:pPr>
+              <a:spcAft>
+                <a:spcPts val="600"/>
+              </a:spcAft>
+            </a:pPr>
+            <a:r>
+              <a:rPr sz="1500">
+                <a:solidFill>
+                  <a:srgbClr val="22282E"/>
+                </a:solidFill>
+              </a:rPr>
+              <a:t>•  Universal link — Enlace web asociado criptográficamente con una aplicación y dominio.</a:t>
+            </a:r>
+          </a:p>
+          <a:p>
+            <a:pPr>
+              <a:spcAft>
+                <a:spcPts val="600"/>
+              </a:spcAft>
+            </a:pPr>
+            <a:r>
+              <a:rPr sz="1500">
+                <a:solidFill>
+                  <a:srgbClr val="22282E"/>
+                </a:solidFill>
+              </a:rPr>
+              <a:t>•  Snapshot — Imagen de interfaz que puede persistir al pasar a segundo plano.</a:t>
             </a:r>
           </a:p>
         </p:txBody>
@@ -4420,7 +4901,7 @@
                   <a:srgbClr val="0B3D2E"/>
                 </a:solidFill>
               </a:rPr>
-              <a:t>🧪 Laboratorio guiado</a:t>
+              <a:t>✅ Criterio de dominio</a:t>
             </a:r>
           </a:p>
         </p:txBody>
@@ -4458,97 +4939,7 @@
                   <a:srgbClr val="22282E"/>
                 </a:solidFill>
               </a:rPr>
-              <a:t>•  Instala la app vulnerable propia (DVIA-v2) en el dispositivo jailbroken.</a:t>
-            </a:r>
-          </a:p>
-          <a:p>
-            <a:pPr>
-              <a:spcAft>
-                <a:spcPts val="600"/>
-              </a:spcAft>
-            </a:pPr>
-            <a:r>
-              <a:rPr sz="1500">
-                <a:solidFill>
-                  <a:srgbClr val="22282E"/>
-                </a:solidFill>
-              </a:rPr>
-              <a:t>•  Descifra el binario: ejecuta python3 dump.py DVIA-v2 y obtén el IPA descifrado.</a:t>
-            </a:r>
-          </a:p>
-          <a:p>
-            <a:pPr>
-              <a:spcAft>
-                <a:spcPts val="600"/>
-              </a:spcAft>
-            </a:pPr>
-            <a:r>
-              <a:rPr sz="1500">
-                <a:solidFill>
-                  <a:srgbClr val="22282E"/>
-                </a:solidFill>
-              </a:rPr>
-              <a:t>•  Analiza estáticamente: descomprime el IPA; revisa Info.plist con plutil -p, extrae entitlements (codesign -d --entitlements :-) y vuelca clases con class-dump.</a:t>
-            </a:r>
-          </a:p>
-          <a:p>
-            <a:pPr>
-              <a:spcAft>
-                <a:spcPts val="600"/>
-              </a:spcAft>
-            </a:pPr>
-            <a:r>
-              <a:rPr sz="1500">
-                <a:solidFill>
-                  <a:srgbClr val="22282E"/>
-                </a:solidFill>
-              </a:rPr>
-              <a:t>•  Busca secretos: strings &lt;binario&gt; | grep -iE "http://|apikey|secret|token".</a:t>
-            </a:r>
-          </a:p>
-          <a:p>
-            <a:pPr>
-              <a:spcAft>
-                <a:spcPts val="600"/>
-              </a:spcAft>
-            </a:pPr>
-            <a:r>
-              <a:rPr sz="1500">
-                <a:solidFill>
-                  <a:srgbClr val="22282E"/>
-                </a:solidFill>
-              </a:rPr>
-              <a:t>•  Inspecciona almacenamiento: con objection, env para localizar directorios, luego revisa Documents/, Library/Preferences/.plist y bases SQLite.</a:t>
-            </a:r>
-          </a:p>
-          <a:p>
-            <a:pPr>
-              <a:spcAft>
-                <a:spcPts val="600"/>
-              </a:spcAft>
-            </a:pPr>
-            <a:r>
-              <a:rPr sz="1500">
-                <a:solidFill>
-                  <a:srgbClr val="22282E"/>
-                </a:solidFill>
-              </a:rPr>
-              <a:t>•  Vuelca el Keychain: objection -g &lt;app&gt; explore → ios keychain dump y anota clases de accesibilidad.</a:t>
-            </a:r>
-          </a:p>
-          <a:p>
-            <a:pPr>
-              <a:spcAft>
-                <a:spcPts val="600"/>
-              </a:spcAft>
-            </a:pPr>
-            <a:r>
-              <a:rPr sz="1500">
-                <a:solidFill>
-                  <a:srgbClr val="22282E"/>
-                </a:solidFill>
-              </a:rPr>
-              <a:t>•  Intercepta TLS: configura proxy y CA; si hay pinning, ejecuta ios sslpinning disable. Verifica el tráfico en Burp.</a:t>
+              <a:t>•  Hay dominio cuando el alumno declara supuestos del dispositivo, vincula evidencia de bundle, datos, red y runtime con una propiedad, evita atacar terceros y produce un retest reproducible.</a:t>
             </a:r>
           </a:p>
         </p:txBody>
@@ -4599,7 +4990,7 @@
                   <a:srgbClr val="0B3D2E"/>
                 </a:solidFill>
               </a:rPr>
-              <a:t>✍️ Ejercicios</a:t>
+              <a:t>📖 Definiciones y características</a:t>
             </a:r>
           </a:p>
         </p:txBody>
@@ -4637,82 +5028,82 @@
                   <a:srgbClr val="22282E"/>
                 </a:solidFill>
               </a:rPr>
-              <a:t>•  Descifra una app propia y confirma con otool -l que la sección LCENCRYPTIONINFO quedó a 0.</a:t>
-            </a:r>
-          </a:p>
-          <a:p>
-            <a:pPr>
-              <a:spcAft>
-                <a:spcPts val="600"/>
-              </a:spcAft>
-            </a:pPr>
-            <a:r>
-              <a:rPr sz="1500">
-                <a:solidFill>
-                  <a:srgbClr val="22282E"/>
-                </a:solidFill>
-              </a:rPr>
-              <a:t>•  Localiza en el Info.plist cualquier excepción ATS y evalúa su riesgo.</a:t>
-            </a:r>
-          </a:p>
-          <a:p>
-            <a:pPr>
-              <a:spcAft>
-                <a:spcPts val="600"/>
-              </a:spcAft>
-            </a:pPr>
-            <a:r>
-              <a:rPr sz="1500">
-                <a:solidFill>
-                  <a:srgbClr val="22282E"/>
-                </a:solidFill>
-              </a:rPr>
-              <a:t>•  Vuelca el Keychain de una app y clasifica cada ítem por su clase de protección.</a:t>
-            </a:r>
-          </a:p>
-          <a:p>
-            <a:pPr>
-              <a:spcAft>
-                <a:spcPts val="600"/>
-              </a:spcAft>
-            </a:pPr>
-            <a:r>
-              <a:rPr sz="1500">
-                <a:solidFill>
-                  <a:srgbClr val="22282E"/>
-                </a:solidFill>
-              </a:rPr>
-              <a:t>•  Escribe un script Frida que hookee un método de detección de jailbreak y lo neutralice.</a:t>
-            </a:r>
-          </a:p>
-          <a:p>
-            <a:pPr>
-              <a:spcAft>
-                <a:spcPts val="600"/>
-              </a:spcAft>
-            </a:pPr>
-            <a:r>
-              <a:rPr sz="1500">
-                <a:solidFill>
-                  <a:srgbClr val="22282E"/>
-                </a:solidFill>
-              </a:rPr>
-              <a:t>•  Compara el tráfico antes y después de evadir el pinning.</a:t>
-            </a:r>
-          </a:p>
-          <a:p>
-            <a:pPr>
-              <a:spcAft>
-                <a:spcPts val="600"/>
-              </a:spcAft>
-            </a:pPr>
-            <a:r>
-              <a:rPr sz="1500">
-                <a:solidFill>
-                  <a:srgbClr val="22282E"/>
-                </a:solidFill>
-              </a:rPr>
-              <a:t>•  Mapea tus hallazgos a MASVS-STORAGE, MASVS-NETWORK y MASVS-RESILIENCE.</a:t>
+              <a:t>•  frida-ios-dump: herramienta que vuelca el binario descifrado desde memoria en un dispositivo con jailbreak. Característica: sortea el cifrado FairPlay para permitir RE.</a:t>
+            </a:r>
+          </a:p>
+          <a:p>
+            <a:pPr>
+              <a:spcAft>
+                <a:spcPts val="600"/>
+              </a:spcAft>
+            </a:pPr>
+            <a:r>
+              <a:rPr sz="1500">
+                <a:solidFill>
+                  <a:srgbClr val="22282E"/>
+                </a:solidFill>
+              </a:rPr>
+              <a:t>•  Info.plist: manifiesto de la app con configuración, permisos de privacidad y ATS. Característica: revela endpoints y excepciones de seguridad de transporte.</a:t>
+            </a:r>
+          </a:p>
+          <a:p>
+            <a:pPr>
+              <a:spcAft>
+                <a:spcPts val="600"/>
+              </a:spcAft>
+            </a:pPr>
+            <a:r>
+              <a:rPr sz="1500">
+                <a:solidFill>
+                  <a:srgbClr val="22282E"/>
+                </a:solidFill>
+              </a:rPr>
+              <a:t>•  App Transport Security (ATS): política que exige HTTPS moderno; sus excepciones (NSAllowsArbitraryLoads) debilitan la comunicación. Característica: hallazgo común de MASVS-NETWORK.</a:t>
+            </a:r>
+          </a:p>
+          <a:p>
+            <a:pPr>
+              <a:spcAft>
+                <a:spcPts val="600"/>
+              </a:spcAft>
+            </a:pPr>
+            <a:r>
+              <a:rPr sz="1500">
+                <a:solidFill>
+                  <a:srgbClr val="22282E"/>
+                </a:solidFill>
+              </a:rPr>
+              <a:t>•  objection: wrapper de Frida con comandos iOS (ios keychain dump, ios sslpinning disable, ios jailbreak disable). Característica: automatiza tareas típicas.</a:t>
+            </a:r>
+          </a:p>
+          <a:p>
+            <a:pPr>
+              <a:spcAft>
+                <a:spcPts val="600"/>
+              </a:spcAft>
+            </a:pPr>
+            <a:r>
+              <a:rPr sz="1500">
+                <a:solidFill>
+                  <a:srgbClr val="22282E"/>
+                </a:solidFill>
+              </a:rPr>
+              <a:t>•  Cycript/Frida: instrumentación en runtime para hookear métodos Objective-C/Swift. Característica: permite modificar el comportamiento en vivo.</a:t>
+            </a:r>
+          </a:p>
+          <a:p>
+            <a:pPr>
+              <a:spcAft>
+                <a:spcPts val="600"/>
+              </a:spcAft>
+            </a:pPr>
+            <a:r>
+              <a:rPr sz="1500">
+                <a:solidFill>
+                  <a:srgbClr val="22282E"/>
+                </a:solidFill>
+              </a:rPr>
+              <a:t>•  Data Protection class: clase de accesibilidad de un ítem del Keychain. Característica: determina si un dato es legible con el dispositivo bloqueado.</a:t>
             </a:r>
           </a:p>
         </p:txBody>
@@ -4763,7 +5154,7 @@
                   <a:srgbClr val="0B3D2E"/>
                 </a:solidFill>
               </a:rPr>
-              <a:t>📝 Reto verificable</a:t>
+              <a:t>🧰 Herramientas y preparación</a:t>
             </a:r>
           </a:p>
         </p:txBody>
@@ -4801,7 +5192,22 @@
                   <a:srgbClr val="22282E"/>
                 </a:solidFill>
               </a:rPr>
-              <a:t>•  Completa un pentest de una app iOS vulnerable y entrega evidencia de tres hallazgos de distinta categoría. Criterio de aceptación: demuestras interceptación exitosa del tráfico HTTPS tras evadir el pinning con una captura, e incluyes el volcado del Keychain señalando al menos un ítem con clase de accesibilidad demasiado permisiva.</a:t>
+              <a:t>•  Burp Suite/mitmproxy con su CA instalado como perfil de confianza en iOS.</a:t>
+            </a:r>
+          </a:p>
+          <a:p>
+            <a:pPr>
+              <a:spcAft>
+                <a:spcPts val="600"/>
+              </a:spcAft>
+            </a:pPr>
+            <a:r>
+              <a:rPr sz="1500">
+                <a:solidFill>
+                  <a:srgbClr val="22282E"/>
+                </a:solidFill>
+              </a:rPr>
+              <a:t>•  class-dump, Hopper/Ghidra, plutil para inspeccionar plists.</a:t>
             </a:r>
           </a:p>
         </p:txBody>
